--- a/reports/2026-07-13_2026-07-19.pptx
+++ b/reports/2026-07-13_2026-07-19.pptx
@@ -3246,9 +3246,7 @@
           <a:noFill/>
         </p:spPr>
         <p:txBody>
-          <a:bodyPr wrap="square" anchor="t" lIns="0" rIns="0" tIns="0" bIns="0">
-            <a:spAutoFit/>
-          </a:bodyPr>
+          <a:bodyPr wrap="square" anchor="t" lIns="0" rIns="0" tIns="0" bIns="0"/>
           <a:lstStyle/>
           <a:p>
             <a:pPr algn="l"/>
@@ -3258,6 +3256,8 @@
                   <a:srgbClr val="FF7B3C"/>
                 </a:solidFill>
                 <a:latin typeface="Malgun Gothic"/>
+                <a:ea typeface="Malgun Gothic"/>
+                <a:cs typeface="Malgun Gothic"/>
               </a:rPr>
               <a:t>WEEKLY HR TREND REPORT</a:t>
             </a:r>
@@ -3281,9 +3281,7 @@
           <a:noFill/>
         </p:spPr>
         <p:txBody>
-          <a:bodyPr wrap="square" anchor="t" lIns="0" rIns="0" tIns="0" bIns="0">
-            <a:spAutoFit/>
-          </a:bodyPr>
+          <a:bodyPr wrap="square" anchor="t" lIns="0" rIns="0" tIns="0" bIns="0"/>
           <a:lstStyle/>
           <a:p>
             <a:pPr algn="l"/>
@@ -3293,6 +3291,8 @@
                   <a:srgbClr val="FFFFFF"/>
                 </a:solidFill>
                 <a:latin typeface="Malgun Gothic"/>
+                <a:ea typeface="Malgun Gothic"/>
+                <a:cs typeface="Malgun Gothic"/>
               </a:rPr>
               <a:t>노사동향 주간 리포트</a:t>
             </a:r>
@@ -3316,9 +3316,7 @@
           <a:noFill/>
         </p:spPr>
         <p:txBody>
-          <a:bodyPr wrap="square" anchor="t" lIns="0" rIns="0" tIns="0" bIns="0">
-            <a:spAutoFit/>
-          </a:bodyPr>
+          <a:bodyPr wrap="square" anchor="t" lIns="0" rIns="0" tIns="0" bIns="0"/>
           <a:lstStyle/>
           <a:p>
             <a:pPr algn="l"/>
@@ -3328,6 +3326,8 @@
                   <a:srgbClr val="E3C6F0"/>
                 </a:solidFill>
                 <a:latin typeface="Malgun Gothic"/>
+                <a:ea typeface="Malgun Gothic"/>
+                <a:cs typeface="Malgun Gothic"/>
               </a:rPr>
               <a:t>2026.07.13 ~ 2026.07.19</a:t>
             </a:r>
@@ -3441,9 +3441,7 @@
           <a:noFill/>
         </p:spPr>
         <p:txBody>
-          <a:bodyPr wrap="square" anchor="t" lIns="0" rIns="0" tIns="0" bIns="0">
-            <a:spAutoFit/>
-          </a:bodyPr>
+          <a:bodyPr wrap="square" anchor="t" lIns="0" rIns="0" tIns="0" bIns="0"/>
           <a:lstStyle/>
           <a:p>
             <a:pPr algn="l"/>
@@ -3453,6 +3451,8 @@
                   <a:srgbClr val="5F0080"/>
                 </a:solidFill>
                 <a:latin typeface="Malgun Gothic"/>
+                <a:ea typeface="Malgun Gothic"/>
+                <a:cs typeface="Malgun Gothic"/>
               </a:rPr>
               <a:t>📌 이번 주 한눈에 보기</a:t>
             </a:r>
@@ -3476,9 +3476,7 @@
           <a:noFill/>
         </p:spPr>
         <p:txBody>
-          <a:bodyPr wrap="square" anchor="t" lIns="0" rIns="0" tIns="0" bIns="0">
-            <a:spAutoFit/>
-          </a:bodyPr>
+          <a:bodyPr wrap="square" anchor="t" lIns="0" rIns="0" tIns="0" bIns="0"/>
           <a:lstStyle/>
           <a:p>
             <a:pPr algn="l"/>
@@ -3488,6 +3486,8 @@
                   <a:srgbClr val="16213E"/>
                 </a:solidFill>
                 <a:latin typeface="Malgun Gothic"/>
+                <a:ea typeface="Malgun Gothic"/>
+                <a:cs typeface="Malgun Gothic"/>
               </a:rPr>
               <a:t>●  2027년 최저임금이 10,700원으로 확정되며 물류·유통 현장의 인건비 부담이 커졌다.</a:t>
             </a:r>
@@ -3511,9 +3511,7 @@
           <a:noFill/>
         </p:spPr>
         <p:txBody>
-          <a:bodyPr wrap="square" anchor="t" lIns="0" rIns="0" tIns="0" bIns="0">
-            <a:spAutoFit/>
-          </a:bodyPr>
+          <a:bodyPr wrap="square" anchor="t" lIns="0" rIns="0" tIns="0" bIns="0"/>
           <a:lstStyle/>
           <a:p>
             <a:pPr algn="l"/>
@@ -3523,6 +3521,8 @@
                   <a:srgbClr val="16213E"/>
                 </a:solidFill>
                 <a:latin typeface="Malgun Gothic"/>
+                <a:ea typeface="Malgun Gothic"/>
+                <a:cs typeface="Malgun Gothic"/>
               </a:rPr>
               <a:t>●  노란봉투법 시행 후 첫 총파업(민주노총)과 울산지노위의 현대차 사용자성 인정으로 원청 책임 확대 흐름이 본격화됐다.</a:t>
             </a:r>
@@ -3546,9 +3546,7 @@
           <a:noFill/>
         </p:spPr>
         <p:txBody>
-          <a:bodyPr wrap="square" anchor="t" lIns="0" rIns="0" tIns="0" bIns="0">
-            <a:spAutoFit/>
-          </a:bodyPr>
+          <a:bodyPr wrap="square" anchor="t" lIns="0" rIns="0" tIns="0" bIns="0"/>
           <a:lstStyle/>
           <a:p>
             <a:pPr algn="l"/>
@@ -3558,6 +3556,8 @@
                   <a:srgbClr val="16213E"/>
                 </a:solidFill>
                 <a:latin typeface="Malgun Gothic"/>
+                <a:ea typeface="Malgun Gothic"/>
+                <a:cs typeface="Malgun Gothic"/>
               </a:rPr>
               <a:t>●  홈플러스는 기습 휴업 반발과 자금난 속에서도 극적으로 파산 위기를 넘겼고, 포스코는 창사 첫 파업 기로에 섰다.</a:t>
             </a:r>
@@ -3629,9 +3629,7 @@
           <a:noFill/>
         </p:spPr>
         <p:txBody>
-          <a:bodyPr wrap="square" anchor="t" lIns="0" rIns="0" tIns="0" bIns="0">
-            <a:spAutoFit/>
-          </a:bodyPr>
+          <a:bodyPr wrap="square" anchor="t" lIns="0" rIns="0" tIns="0" bIns="0"/>
           <a:lstStyle/>
           <a:p>
             <a:pPr algn="l"/>
@@ -3641,6 +3639,8 @@
                   <a:srgbClr val="16213E"/>
                 </a:solidFill>
                 <a:latin typeface="Malgun Gothic"/>
+                <a:ea typeface="Malgun Gothic"/>
+                <a:cs typeface="Malgun Gothic"/>
               </a:rPr>
               <a:t>🏬 유통업계</a:t>
             </a:r>
@@ -3691,11 +3691,13 @@
           <a:p>
             <a:pPr algn="ctr"/>
             <a:r>
-              <a:rPr sz="1000" b="1">
+              <a:rPr sz="1000" b="1" i="0">
                 <a:solidFill>
                   <a:srgbClr val="5F0080"/>
                 </a:solidFill>
                 <a:latin typeface="Malgun Gothic"/>
+                <a:ea typeface="Malgun Gothic"/>
+                <a:cs typeface="Malgun Gothic"/>
               </a:rPr>
               <a:t>RETAIL</a:t>
             </a:r>
@@ -3790,11 +3792,13 @@
           <a:p>
             <a:pPr algn="ctr"/>
             <a:r>
-              <a:rPr sz="850" b="1">
+              <a:rPr sz="850" b="1" i="0">
                 <a:solidFill>
                   <a:srgbClr val="FFFFFF"/>
                 </a:solidFill>
                 <a:latin typeface="Malgun Gothic"/>
+                <a:ea typeface="Malgun Gothic"/>
+                <a:cs typeface="Malgun Gothic"/>
               </a:rPr>
               <a:t>CHECK</a:t>
             </a:r>
@@ -3818,9 +3822,7 @@
           <a:noFill/>
         </p:spPr>
         <p:txBody>
-          <a:bodyPr wrap="square" anchor="t" lIns="0" rIns="0" tIns="0" bIns="0">
-            <a:spAutoFit/>
-          </a:bodyPr>
+          <a:bodyPr wrap="square" anchor="t" lIns="0" rIns="0" tIns="0" bIns="0"/>
           <a:lstStyle/>
           <a:p>
             <a:pPr algn="l"/>
@@ -3830,6 +3832,9 @@
                   <a:srgbClr val="16213E"/>
                 </a:solidFill>
                 <a:latin typeface="Malgun Gothic"/>
+                <a:ea typeface="Malgun Gothic"/>
+                <a:cs typeface="Malgun Gothic"/>
+                <a:hlinkClick r:id="rId2"/>
               </a:rPr>
               <a:t>2027년 최저임금 시간급 10,700원 확정</a:t>
             </a:r>
@@ -3853,9 +3858,7 @@
           <a:noFill/>
         </p:spPr>
         <p:txBody>
-          <a:bodyPr wrap="square" anchor="t" lIns="0" rIns="0" tIns="0" bIns="0">
-            <a:spAutoFit/>
-          </a:bodyPr>
+          <a:bodyPr wrap="square" anchor="t" lIns="0" rIns="0" tIns="0" bIns="0"/>
           <a:lstStyle/>
           <a:p>
             <a:pPr algn="l"/>
@@ -3865,6 +3868,8 @@
                   <a:srgbClr val="5B6474"/>
                 </a:solidFill>
                 <a:latin typeface="Malgun Gothic"/>
+                <a:ea typeface="Malgun Gothic"/>
+                <a:cs typeface="Malgun Gothic"/>
               </a:rPr>
               <a:t>최저임금위원회가 제14차 전원회의에서 2027년 적용 최저임금을 10,700원(3.7% 인상)으로 의결했다. 시급제 인력 비중이 큰 물류·배송 현장의 인건비 부담이 커질 전망이다.</a:t>
             </a:r>
@@ -3888,9 +3893,7 @@
           <a:noFill/>
         </p:spPr>
         <p:txBody>
-          <a:bodyPr wrap="square" anchor="t" lIns="0" rIns="0" tIns="0" bIns="0">
-            <a:spAutoFit/>
-          </a:bodyPr>
+          <a:bodyPr wrap="square" anchor="t" lIns="0" rIns="0" tIns="0" bIns="0"/>
           <a:lstStyle/>
           <a:p>
             <a:pPr algn="l"/>
@@ -3900,6 +3903,8 @@
                   <a:srgbClr val="97A0B3"/>
                 </a:solidFill>
                 <a:latin typeface="Malgun Gothic"/>
+                <a:ea typeface="Malgun Gothic"/>
+                <a:cs typeface="Malgun Gothic"/>
               </a:rPr>
               <a:t>최저임금위원회 · 2026.07.14</a:t>
             </a:r>
@@ -3967,9 +3972,7 @@
           <a:noFill/>
         </p:spPr>
         <p:txBody>
-          <a:bodyPr wrap="square" anchor="t" lIns="0" rIns="0" tIns="0" bIns="0">
-            <a:spAutoFit/>
-          </a:bodyPr>
+          <a:bodyPr wrap="square" anchor="t" lIns="0" rIns="0" tIns="0" bIns="0"/>
           <a:lstStyle/>
           <a:p>
             <a:pPr algn="l"/>
@@ -3979,6 +3982,9 @@
                   <a:srgbClr val="16213E"/>
                 </a:solidFill>
                 <a:latin typeface="Malgun Gothic"/>
+                <a:ea typeface="Malgun Gothic"/>
+                <a:cs typeface="Malgun Gothic"/>
+                <a:hlinkClick r:id="rId3"/>
               </a:rPr>
               <a:t>홈플러스, 기습 휴업 통보에 노조 반발</a:t>
             </a:r>
@@ -4002,9 +4008,7 @@
           <a:noFill/>
         </p:spPr>
         <p:txBody>
-          <a:bodyPr wrap="square" anchor="t" lIns="0" rIns="0" tIns="0" bIns="0">
-            <a:spAutoFit/>
-          </a:bodyPr>
+          <a:bodyPr wrap="square" anchor="t" lIns="0" rIns="0" tIns="0" bIns="0"/>
           <a:lstStyle/>
           <a:p>
             <a:pPr algn="l"/>
@@ -4014,6 +4018,8 @@
                   <a:srgbClr val="5B6474"/>
                 </a:solidFill>
                 <a:latin typeface="Malgun Gothic"/>
+                <a:ea typeface="Malgun Gothic"/>
+                <a:cs typeface="Malgun Gothic"/>
               </a:rPr>
               <a:t>전 점포에 '출근 후 즉시 퇴근' 지시가 내려가자 마트노조가 사전 협의 없는 일방적 조치라며 강력 반발했다.</a:t>
             </a:r>
@@ -4037,9 +4043,7 @@
           <a:noFill/>
         </p:spPr>
         <p:txBody>
-          <a:bodyPr wrap="square" anchor="t" lIns="0" rIns="0" tIns="0" bIns="0">
-            <a:spAutoFit/>
-          </a:bodyPr>
+          <a:bodyPr wrap="square" anchor="t" lIns="0" rIns="0" tIns="0" bIns="0"/>
           <a:lstStyle/>
           <a:p>
             <a:pPr algn="l"/>
@@ -4049,6 +4053,8 @@
                   <a:srgbClr val="97A0B3"/>
                 </a:solidFill>
                 <a:latin typeface="Malgun Gothic"/>
+                <a:ea typeface="Malgun Gothic"/>
+                <a:cs typeface="Malgun Gothic"/>
               </a:rPr>
               <a:t>뉴스핌 · 2026.07.13</a:t>
             </a:r>
@@ -4116,9 +4122,7 @@
           <a:noFill/>
         </p:spPr>
         <p:txBody>
-          <a:bodyPr wrap="square" anchor="t" lIns="0" rIns="0" tIns="0" bIns="0">
-            <a:spAutoFit/>
-          </a:bodyPr>
+          <a:bodyPr wrap="square" anchor="t" lIns="0" rIns="0" tIns="0" bIns="0"/>
           <a:lstStyle/>
           <a:p>
             <a:pPr algn="l"/>
@@ -4128,6 +4132,9 @@
                   <a:srgbClr val="16213E"/>
                 </a:solidFill>
                 <a:latin typeface="Malgun Gothic"/>
+                <a:ea typeface="Malgun Gothic"/>
+                <a:cs typeface="Malgun Gothic"/>
+                <a:hlinkClick r:id="rId4"/>
               </a:rPr>
               <a:t>마트노조, MBK 규탄 집회…촛불집회 돌입</a:t>
             </a:r>
@@ -4151,9 +4158,7 @@
           <a:noFill/>
         </p:spPr>
         <p:txBody>
-          <a:bodyPr wrap="square" anchor="t" lIns="0" rIns="0" tIns="0" bIns="0">
-            <a:spAutoFit/>
-          </a:bodyPr>
+          <a:bodyPr wrap="square" anchor="t" lIns="0" rIns="0" tIns="0" bIns="0"/>
           <a:lstStyle/>
           <a:p>
             <a:pPr algn="l"/>
@@ -4163,6 +4168,8 @@
                   <a:srgbClr val="5B6474"/>
                 </a:solidFill>
                 <a:latin typeface="Malgun Gothic"/>
+                <a:ea typeface="Malgun Gothic"/>
+                <a:cs typeface="Malgun Gothic"/>
               </a:rPr>
               <a:t>마트산업노조가 홈플러스 대주주 MBK파트너스를 규탄하는 집회를 열고, 이후 매일 저녁 촛불집회를 이어가기로 했다.</a:t>
             </a:r>
@@ -4186,9 +4193,7 @@
           <a:noFill/>
         </p:spPr>
         <p:txBody>
-          <a:bodyPr wrap="square" anchor="t" lIns="0" rIns="0" tIns="0" bIns="0">
-            <a:spAutoFit/>
-          </a:bodyPr>
+          <a:bodyPr wrap="square" anchor="t" lIns="0" rIns="0" tIns="0" bIns="0"/>
           <a:lstStyle/>
           <a:p>
             <a:pPr algn="l"/>
@@ -4198,6 +4203,8 @@
                   <a:srgbClr val="97A0B3"/>
                 </a:solidFill>
                 <a:latin typeface="Malgun Gothic"/>
+                <a:ea typeface="Malgun Gothic"/>
+                <a:cs typeface="Malgun Gothic"/>
               </a:rPr>
               <a:t>이투데이 · 2026.07.15</a:t>
             </a:r>
@@ -4265,9 +4272,7 @@
           <a:noFill/>
         </p:spPr>
         <p:txBody>
-          <a:bodyPr wrap="square" anchor="t" lIns="0" rIns="0" tIns="0" bIns="0">
-            <a:spAutoFit/>
-          </a:bodyPr>
+          <a:bodyPr wrap="square" anchor="t" lIns="0" rIns="0" tIns="0" bIns="0"/>
           <a:lstStyle/>
           <a:p>
             <a:pPr algn="l"/>
@@ -4277,6 +4282,9 @@
                   <a:srgbClr val="16213E"/>
                 </a:solidFill>
                 <a:latin typeface="Malgun Gothic"/>
+                <a:ea typeface="Malgun Gothic"/>
+                <a:cs typeface="Malgun Gothic"/>
+                <a:hlinkClick r:id="rId4"/>
               </a:rPr>
               <a:t>홈플러스, 메리츠 이사회 극적 의결로 2000억 확보</a:t>
             </a:r>
@@ -4300,9 +4308,7 @@
           <a:noFill/>
         </p:spPr>
         <p:txBody>
-          <a:bodyPr wrap="square" anchor="t" lIns="0" rIns="0" tIns="0" bIns="0">
-            <a:spAutoFit/>
-          </a:bodyPr>
+          <a:bodyPr wrap="square" anchor="t" lIns="0" rIns="0" tIns="0" bIns="0"/>
           <a:lstStyle/>
           <a:p>
             <a:pPr algn="l"/>
@@ -4312,6 +4318,8 @@
                   <a:srgbClr val="5B6474"/>
                 </a:solidFill>
                 <a:latin typeface="Malgun Gothic"/>
+                <a:ea typeface="Malgun Gothic"/>
+                <a:cs typeface="Malgun Gothic"/>
               </a:rPr>
               <a:t>메리츠금융지주 이사회가 진통 끝에 2000억원 DIP 자금 지원을 의결하며 홈플러스가 당장의 파산 위기를 넘겼다.</a:t>
             </a:r>
@@ -4335,9 +4343,7 @@
           <a:noFill/>
         </p:spPr>
         <p:txBody>
-          <a:bodyPr wrap="square" anchor="t" lIns="0" rIns="0" tIns="0" bIns="0">
-            <a:spAutoFit/>
-          </a:bodyPr>
+          <a:bodyPr wrap="square" anchor="t" lIns="0" rIns="0" tIns="0" bIns="0"/>
           <a:lstStyle/>
           <a:p>
             <a:pPr algn="l"/>
@@ -4347,6 +4353,8 @@
                   <a:srgbClr val="97A0B3"/>
                 </a:solidFill>
                 <a:latin typeface="Malgun Gothic"/>
+                <a:ea typeface="Malgun Gothic"/>
+                <a:cs typeface="Malgun Gothic"/>
               </a:rPr>
               <a:t>종합보도 · 2026.07.16</a:t>
             </a:r>
@@ -4418,9 +4426,7 @@
           <a:noFill/>
         </p:spPr>
         <p:txBody>
-          <a:bodyPr wrap="square" anchor="t" lIns="0" rIns="0" tIns="0" bIns="0">
-            <a:spAutoFit/>
-          </a:bodyPr>
+          <a:bodyPr wrap="square" anchor="t" lIns="0" rIns="0" tIns="0" bIns="0"/>
           <a:lstStyle/>
           <a:p>
             <a:pPr algn="l"/>
@@ -4430,6 +4436,8 @@
                   <a:srgbClr val="16213E"/>
                 </a:solidFill>
                 <a:latin typeface="Malgun Gothic"/>
+                <a:ea typeface="Malgun Gothic"/>
+                <a:cs typeface="Malgun Gothic"/>
               </a:rPr>
               <a:t>🏢 타 산업군</a:t>
             </a:r>
@@ -4480,11 +4488,13 @@
           <a:p>
             <a:pPr algn="ctr"/>
             <a:r>
-              <a:rPr sz="1000" b="1">
+              <a:rPr sz="1000" b="1" i="0">
                 <a:solidFill>
                   <a:srgbClr val="B8501A"/>
                 </a:solidFill>
                 <a:latin typeface="Malgun Gothic"/>
+                <a:ea typeface="Malgun Gothic"/>
+                <a:cs typeface="Malgun Gothic"/>
               </a:rPr>
               <a:t>OTHER</a:t>
             </a:r>
@@ -4579,11 +4589,13 @@
           <a:p>
             <a:pPr algn="ctr"/>
             <a:r>
-              <a:rPr sz="850" b="1">
+              <a:rPr sz="850" b="1" i="0">
                 <a:solidFill>
                   <a:srgbClr val="FFFFFF"/>
                 </a:solidFill>
                 <a:latin typeface="Malgun Gothic"/>
+                <a:ea typeface="Malgun Gothic"/>
+                <a:cs typeface="Malgun Gothic"/>
               </a:rPr>
               <a:t>CHECK</a:t>
             </a:r>
@@ -4607,9 +4619,7 @@
           <a:noFill/>
         </p:spPr>
         <p:txBody>
-          <a:bodyPr wrap="square" anchor="t" lIns="0" rIns="0" tIns="0" bIns="0">
-            <a:spAutoFit/>
-          </a:bodyPr>
+          <a:bodyPr wrap="square" anchor="t" lIns="0" rIns="0" tIns="0" bIns="0"/>
           <a:lstStyle/>
           <a:p>
             <a:pPr algn="l"/>
@@ -4619,6 +4629,9 @@
                   <a:srgbClr val="16213E"/>
                 </a:solidFill>
                 <a:latin typeface="Malgun Gothic"/>
+                <a:ea typeface="Malgun Gothic"/>
+                <a:cs typeface="Malgun Gothic"/>
+                <a:hlinkClick r:id="rId5"/>
               </a:rPr>
               <a:t>울산지노위, 현대차 사내하청 '사용자성' 첫 인정</a:t>
             </a:r>
@@ -4642,9 +4655,7 @@
           <a:noFill/>
         </p:spPr>
         <p:txBody>
-          <a:bodyPr wrap="square" anchor="t" lIns="0" rIns="0" tIns="0" bIns="0">
-            <a:spAutoFit/>
-          </a:bodyPr>
+          <a:bodyPr wrap="square" anchor="t" lIns="0" rIns="0" tIns="0" bIns="0"/>
           <a:lstStyle/>
           <a:p>
             <a:pPr algn="l"/>
@@ -4654,6 +4665,8 @@
                   <a:srgbClr val="5B6474"/>
                 </a:solidFill>
                 <a:latin typeface="Malgun Gothic"/>
+                <a:ea typeface="Malgun Gothic"/>
+                <a:cs typeface="Malgun Gothic"/>
               </a:rPr>
               <a:t>노란봉투법 시행 후 완성차 업계 첫 사례로, 원청이 사내하청 생산직·구내식당·보안인력에 대해 사용자성이 있다고 판단했다. 원청-위탁 구조 전반에 파급력이 예상된다.</a:t>
             </a:r>
@@ -4677,9 +4690,7 @@
           <a:noFill/>
         </p:spPr>
         <p:txBody>
-          <a:bodyPr wrap="square" anchor="t" lIns="0" rIns="0" tIns="0" bIns="0">
-            <a:spAutoFit/>
-          </a:bodyPr>
+          <a:bodyPr wrap="square" anchor="t" lIns="0" rIns="0" tIns="0" bIns="0"/>
           <a:lstStyle/>
           <a:p>
             <a:pPr algn="l"/>
@@ -4689,6 +4700,8 @@
                   <a:srgbClr val="97A0B3"/>
                 </a:solidFill>
                 <a:latin typeface="Malgun Gothic"/>
+                <a:ea typeface="Malgun Gothic"/>
+                <a:cs typeface="Malgun Gothic"/>
               </a:rPr>
               <a:t>아주경제 · 2026.07.15</a:t>
             </a:r>
@@ -4783,11 +4796,13 @@
           <a:p>
             <a:pPr algn="ctr"/>
             <a:r>
-              <a:rPr sz="850" b="1">
+              <a:rPr sz="850" b="1" i="0">
                 <a:solidFill>
                   <a:srgbClr val="FFFFFF"/>
                 </a:solidFill>
                 <a:latin typeface="Malgun Gothic"/>
+                <a:ea typeface="Malgun Gothic"/>
+                <a:cs typeface="Malgun Gothic"/>
               </a:rPr>
               <a:t>CHECK</a:t>
             </a:r>
@@ -4811,9 +4826,7 @@
           <a:noFill/>
         </p:spPr>
         <p:txBody>
-          <a:bodyPr wrap="square" anchor="t" lIns="0" rIns="0" tIns="0" bIns="0">
-            <a:spAutoFit/>
-          </a:bodyPr>
+          <a:bodyPr wrap="square" anchor="t" lIns="0" rIns="0" tIns="0" bIns="0"/>
           <a:lstStyle/>
           <a:p>
             <a:pPr algn="l"/>
@@ -4823,6 +4836,9 @@
                   <a:srgbClr val="16213E"/>
                 </a:solidFill>
                 <a:latin typeface="Malgun Gothic"/>
+                <a:ea typeface="Malgun Gothic"/>
+                <a:cs typeface="Malgun Gothic"/>
+                <a:hlinkClick r:id="rId6"/>
               </a:rPr>
               <a:t>민주노총, 노란봉투법 시행 후 첫 총파업 돌입</a:t>
             </a:r>
@@ -4846,9 +4862,7 @@
           <a:noFill/>
         </p:spPr>
         <p:txBody>
-          <a:bodyPr wrap="square" anchor="t" lIns="0" rIns="0" tIns="0" bIns="0">
-            <a:spAutoFit/>
-          </a:bodyPr>
+          <a:bodyPr wrap="square" anchor="t" lIns="0" rIns="0" tIns="0" bIns="0"/>
           <a:lstStyle/>
           <a:p>
             <a:pPr algn="l"/>
@@ -4858,6 +4872,8 @@
                   <a:srgbClr val="5B6474"/>
                 </a:solidFill>
                 <a:latin typeface="Malgun Gothic"/>
+                <a:ea typeface="Malgun Gothic"/>
+                <a:cs typeface="Malgun Gothic"/>
               </a:rPr>
               <a:t>서울 1만명·전국 10만명 규모로 총파업대회를 열고 원청의 사용자 책임 인정을 요구했다. 8~9월 추가 투쟁도 예고했다.</a:t>
             </a:r>
@@ -4881,9 +4897,7 @@
           <a:noFill/>
         </p:spPr>
         <p:txBody>
-          <a:bodyPr wrap="square" anchor="t" lIns="0" rIns="0" tIns="0" bIns="0">
-            <a:spAutoFit/>
-          </a:bodyPr>
+          <a:bodyPr wrap="square" anchor="t" lIns="0" rIns="0" tIns="0" bIns="0"/>
           <a:lstStyle/>
           <a:p>
             <a:pPr algn="l"/>
@@ -4893,6 +4907,8 @@
                   <a:srgbClr val="97A0B3"/>
                 </a:solidFill>
                 <a:latin typeface="Malgun Gothic"/>
+                <a:ea typeface="Malgun Gothic"/>
+                <a:cs typeface="Malgun Gothic"/>
               </a:rPr>
               <a:t>뉴스핌 · 2026.07.15</a:t>
             </a:r>
@@ -4960,9 +4976,7 @@
           <a:noFill/>
         </p:spPr>
         <p:txBody>
-          <a:bodyPr wrap="square" anchor="t" lIns="0" rIns="0" tIns="0" bIns="0">
-            <a:spAutoFit/>
-          </a:bodyPr>
+          <a:bodyPr wrap="square" anchor="t" lIns="0" rIns="0" tIns="0" bIns="0"/>
           <a:lstStyle/>
           <a:p>
             <a:pPr algn="l"/>
@@ -4972,6 +4986,9 @@
                   <a:srgbClr val="16213E"/>
                 </a:solidFill>
                 <a:latin typeface="Malgun Gothic"/>
+                <a:ea typeface="Malgun Gothic"/>
+                <a:cs typeface="Malgun Gothic"/>
+                <a:hlinkClick r:id="rId7"/>
               </a:rPr>
               <a:t>현대차 노조, 부분파업 지속…임단협 장기전</a:t>
             </a:r>
@@ -4995,9 +5012,7 @@
           <a:noFill/>
         </p:spPr>
         <p:txBody>
-          <a:bodyPr wrap="square" anchor="t" lIns="0" rIns="0" tIns="0" bIns="0">
-            <a:spAutoFit/>
-          </a:bodyPr>
+          <a:bodyPr wrap="square" anchor="t" lIns="0" rIns="0" tIns="0" bIns="0"/>
           <a:lstStyle/>
           <a:p>
             <a:pPr algn="l"/>
@@ -5007,6 +5022,8 @@
                   <a:srgbClr val="5B6474"/>
                 </a:solidFill>
                 <a:latin typeface="Malgun Gothic"/>
+                <a:ea typeface="Malgun Gothic"/>
+                <a:cs typeface="Malgun Gothic"/>
               </a:rPr>
               <a:t>15차 교섭 결렬 후 사흘간 부분파업에 이어 20~22일 추가 부분파업을 의결했다. 기본급 인상폭을 둘러싼 이견이 좁혀지지 않고 있다.</a:t>
             </a:r>
@@ -5030,9 +5047,7 @@
           <a:noFill/>
         </p:spPr>
         <p:txBody>
-          <a:bodyPr wrap="square" anchor="t" lIns="0" rIns="0" tIns="0" bIns="0">
-            <a:spAutoFit/>
-          </a:bodyPr>
+          <a:bodyPr wrap="square" anchor="t" lIns="0" rIns="0" tIns="0" bIns="0"/>
           <a:lstStyle/>
           <a:p>
             <a:pPr algn="l"/>
@@ -5042,6 +5057,8 @@
                   <a:srgbClr val="97A0B3"/>
                 </a:solidFill>
                 <a:latin typeface="Malgun Gothic"/>
+                <a:ea typeface="Malgun Gothic"/>
+                <a:cs typeface="Malgun Gothic"/>
               </a:rPr>
               <a:t>파이낸셜뉴스 · 2026.07.13</a:t>
             </a:r>
@@ -5109,9 +5126,7 @@
           <a:noFill/>
         </p:spPr>
         <p:txBody>
-          <a:bodyPr wrap="square" anchor="t" lIns="0" rIns="0" tIns="0" bIns="0">
-            <a:spAutoFit/>
-          </a:bodyPr>
+          <a:bodyPr wrap="square" anchor="t" lIns="0" rIns="0" tIns="0" bIns="0"/>
           <a:lstStyle/>
           <a:p>
             <a:pPr algn="l"/>
@@ -5121,6 +5136,9 @@
                   <a:srgbClr val="16213E"/>
                 </a:solidFill>
                 <a:latin typeface="Malgun Gothic"/>
+                <a:ea typeface="Malgun Gothic"/>
+                <a:cs typeface="Malgun Gothic"/>
+                <a:hlinkClick r:id="rId8"/>
               </a:rPr>
               <a:t>포스코, 58년 무분규 기록 깨지나…쟁의행위 가결</a:t>
             </a:r>
@@ -5144,9 +5162,7 @@
           <a:noFill/>
         </p:spPr>
         <p:txBody>
-          <a:bodyPr wrap="square" anchor="t" lIns="0" rIns="0" tIns="0" bIns="0">
-            <a:spAutoFit/>
-          </a:bodyPr>
+          <a:bodyPr wrap="square" anchor="t" lIns="0" rIns="0" tIns="0" bIns="0"/>
           <a:lstStyle/>
           <a:p>
             <a:pPr algn="l"/>
@@ -5156,6 +5172,8 @@
                   <a:srgbClr val="5B6474"/>
                 </a:solidFill>
                 <a:latin typeface="Malgun Gothic"/>
+                <a:ea typeface="Malgun Gothic"/>
+                <a:cs typeface="Malgun Gothic"/>
               </a:rPr>
               <a:t>임금·복지와 협력사 직고용 문제를 두고 노사가 충돌, 쟁의행위 찬반투표가 가결되며 창사 이래 첫 파업 가능성이 커졌다.</a:t>
             </a:r>
@@ -5179,9 +5197,7 @@
           <a:noFill/>
         </p:spPr>
         <p:txBody>
-          <a:bodyPr wrap="square" anchor="t" lIns="0" rIns="0" tIns="0" bIns="0">
-            <a:spAutoFit/>
-          </a:bodyPr>
+          <a:bodyPr wrap="square" anchor="t" lIns="0" rIns="0" tIns="0" bIns="0"/>
           <a:lstStyle/>
           <a:p>
             <a:pPr algn="l"/>
@@ -5191,6 +5207,8 @@
                   <a:srgbClr val="97A0B3"/>
                 </a:solidFill>
                 <a:latin typeface="Malgun Gothic"/>
+                <a:ea typeface="Malgun Gothic"/>
+                <a:cs typeface="Malgun Gothic"/>
               </a:rPr>
               <a:t>아시아투데이 · 2026.07.13</a:t>
             </a:r>
@@ -5258,9 +5276,7 @@
           <a:noFill/>
         </p:spPr>
         <p:txBody>
-          <a:bodyPr wrap="square" anchor="t" lIns="0" rIns="0" tIns="0" bIns="0">
-            <a:spAutoFit/>
-          </a:bodyPr>
+          <a:bodyPr wrap="square" anchor="t" lIns="0" rIns="0" tIns="0" bIns="0"/>
           <a:lstStyle/>
           <a:p>
             <a:pPr algn="l"/>
@@ -5270,6 +5286,9 @@
                   <a:srgbClr val="16213E"/>
                 </a:solidFill>
                 <a:latin typeface="Malgun Gothic"/>
+                <a:ea typeface="Malgun Gothic"/>
+                <a:cs typeface="Malgun Gothic"/>
+                <a:hlinkClick r:id="rId9"/>
               </a:rPr>
               <a:t>금융노조, 주4.5일제 두고 하투 격화</a:t>
             </a:r>
@@ -5293,9 +5312,7 @@
           <a:noFill/>
         </p:spPr>
         <p:txBody>
-          <a:bodyPr wrap="square" anchor="t" lIns="0" rIns="0" tIns="0" bIns="0">
-            <a:spAutoFit/>
-          </a:bodyPr>
+          <a:bodyPr wrap="square" anchor="t" lIns="0" rIns="0" tIns="0" bIns="0"/>
           <a:lstStyle/>
           <a:p>
             <a:pPr algn="l"/>
@@ -5305,6 +5322,8 @@
                   <a:srgbClr val="5B6474"/>
                 </a:solidFill>
                 <a:latin typeface="Malgun Gothic"/>
+                <a:ea typeface="Malgun Gothic"/>
+                <a:cs typeface="Malgun Gothic"/>
               </a:rPr>
               <a:t>임단협 결렬에 이어 중노위 조정도 난항을 겪으며 금융노조의 하계 투쟁 수위가 높아지고 있다.</a:t>
             </a:r>
@@ -5328,9 +5347,7 @@
           <a:noFill/>
         </p:spPr>
         <p:txBody>
-          <a:bodyPr wrap="square" anchor="t" lIns="0" rIns="0" tIns="0" bIns="0">
-            <a:spAutoFit/>
-          </a:bodyPr>
+          <a:bodyPr wrap="square" anchor="t" lIns="0" rIns="0" tIns="0" bIns="0"/>
           <a:lstStyle/>
           <a:p>
             <a:pPr algn="l"/>
@@ -5340,6 +5357,8 @@
                   <a:srgbClr val="97A0B3"/>
                 </a:solidFill>
                 <a:latin typeface="Malgun Gothic"/>
+                <a:ea typeface="Malgun Gothic"/>
+                <a:cs typeface="Malgun Gothic"/>
               </a:rPr>
               <a:t>아주경제 · 2026.07.16</a:t>
             </a:r>
@@ -5363,9 +5382,7 @@
           <a:noFill/>
         </p:spPr>
         <p:txBody>
-          <a:bodyPr wrap="square" anchor="t" lIns="0" rIns="0" tIns="0" bIns="0">
-            <a:spAutoFit/>
-          </a:bodyPr>
+          <a:bodyPr wrap="square" anchor="t" lIns="0" rIns="0" tIns="0" bIns="0"/>
           <a:lstStyle/>
           <a:p>
             <a:pPr algn="l"/>
@@ -5375,6 +5392,8 @@
                   <a:srgbClr val="97A0B3"/>
                 </a:solidFill>
                 <a:latin typeface="Malgun Gothic"/>
+                <a:ea typeface="Malgun Gothic"/>
+                <a:cs typeface="Malgun Gothic"/>
               </a:rPr>
               <a:t>노사동향 위클리</a:t>
             </a:r>
@@ -5398,9 +5417,7 @@
           <a:noFill/>
         </p:spPr>
         <p:txBody>
-          <a:bodyPr wrap="square" anchor="t" lIns="0" rIns="0" tIns="0" bIns="0">
-            <a:spAutoFit/>
-          </a:bodyPr>
+          <a:bodyPr wrap="square" anchor="t" lIns="0" rIns="0" tIns="0" bIns="0"/>
           <a:lstStyle/>
           <a:p>
             <a:pPr algn="r"/>
@@ -5410,6 +5427,8 @@
                   <a:srgbClr val="97A0B3"/>
                 </a:solidFill>
                 <a:latin typeface="Malgun Gothic"/>
+                <a:ea typeface="Malgun Gothic"/>
+                <a:cs typeface="Malgun Gothic"/>
               </a:rPr>
               <a:t>발행일 2026.07.18</a:t>
             </a:r>
@@ -5526,12 +5545,20 @@
           </a:p>
         </p:txBody>
       </p:sp>
-      <p:sp>
-        <p:nvSpPr>
-          <p:cNvPr id="4" name="Oval 3"/>
-          <p:cNvSpPr/>
-          <p:nvPr/>
-        </p:nvSpPr>
+      <p:pic>
+        <p:nvPicPr>
+          <p:cNvPr id="4" name="Picture 3" descr="avatar.jpg"/>
+          <p:cNvPicPr>
+            <a:picLocks noChangeAspect="1"/>
+          </p:cNvPicPr>
+          <p:nvPr/>
+        </p:nvPicPr>
+        <p:blipFill>
+          <a:blip r:embed="rId2"/>
+          <a:stretch>
+            <a:fillRect/>
+          </a:stretch>
+        </p:blipFill>
         <p:spPr>
           <a:xfrm>
             <a:off x="777240" y="777240"/>
@@ -5540,40 +5567,8 @@
           <a:prstGeom prst="ellipse">
             <a:avLst/>
           </a:prstGeom>
-          <a:solidFill>
-            <a:srgbClr val="EAE3F0"/>
-          </a:solidFill>
-          <a:ln>
-            <a:noFill/>
-          </a:ln>
-          <a:effectLst/>
-        </p:spPr>
-        <p:style>
-          <a:lnRef idx="1">
-            <a:schemeClr val="accent1"/>
-          </a:lnRef>
-          <a:fillRef idx="3">
-            <a:schemeClr val="accent1"/>
-          </a:fillRef>
-          <a:effectRef idx="2">
-            <a:schemeClr val="accent1"/>
-          </a:effectRef>
-          <a:fontRef idx="minor">
-            <a:schemeClr val="lt1"/>
-          </a:fontRef>
-        </p:style>
-        <p:txBody>
-          <a:bodyPr rtlCol="0" anchor="ctr" lIns="0" rIns="0" tIns="0" bIns="0"/>
-          <a:lstStyle/>
-          <a:p>
-            <a:pPr algn="ctr"/>
-            <a:r>
-              <a:rPr sz="2200"/>
-              <a:t>🧑‍💼</a:t>
-            </a:r>
-          </a:p>
-        </p:txBody>
-      </p:sp>
+        </p:spPr>
+      </p:pic>
       <p:sp>
         <p:nvSpPr>
           <p:cNvPr id="5" name="TextBox 4"/>
@@ -5591,9 +5586,7 @@
           <a:noFill/>
         </p:spPr>
         <p:txBody>
-          <a:bodyPr wrap="square" anchor="ctr" lIns="0" rIns="0" tIns="0" bIns="0">
-            <a:spAutoFit/>
-          </a:bodyPr>
+          <a:bodyPr wrap="square" anchor="ctr" lIns="0" rIns="0" tIns="0" bIns="0"/>
           <a:lstStyle/>
           <a:p>
             <a:pPr algn="l"/>
@@ -5603,6 +5596,8 @@
                   <a:srgbClr val="16213E"/>
                 </a:solidFill>
                 <a:latin typeface="Malgun Gothic"/>
+                <a:ea typeface="Malgun Gothic"/>
+                <a:cs typeface="Malgun Gothic"/>
               </a:rPr>
               <a:t>📝 담당자 코멘트</a:t>
             </a:r>
@@ -5676,11 +5671,13 @@
           <a:lstStyle/>
           <a:p>
             <a:r>
-              <a:rPr sz="1400" i="1">
+              <a:rPr sz="1400" b="0" i="1">
                 <a:solidFill>
                   <a:srgbClr val="A7AEB8"/>
                 </a:solidFill>
                 <a:latin typeface="Malgun Gothic"/>
+                <a:ea typeface="Malgun Gothic"/>
+                <a:cs typeface="Malgun Gothic"/>
               </a:rPr>
               <a:t>여기에 의견을 작성하세요.</a:t>
             </a:r>

--- a/reports/2026-07-13_2026-07-19.pptx
+++ b/reports/2026-07-13_2026-07-19.pptx
@@ -4284,7 +4284,7 @@
                 <a:latin typeface="Malgun Gothic"/>
                 <a:ea typeface="Malgun Gothic"/>
                 <a:cs typeface="Malgun Gothic"/>
-                <a:hlinkClick r:id="rId4"/>
+                <a:hlinkClick r:id="rId5"/>
               </a:rPr>
               <a:t>홈플러스, 메리츠 이사회 극적 의결로 2000억 확보</a:t>
             </a:r>
@@ -4356,7 +4356,7 @@
                 <a:ea typeface="Malgun Gothic"/>
                 <a:cs typeface="Malgun Gothic"/>
               </a:rPr>
-              <a:t>종합보도 · 2026.07.16</a:t>
+              <a:t>뉴스핌 · 2026.07.16</a:t>
             </a:r>
           </a:p>
         </p:txBody>
@@ -4631,7 +4631,7 @@
                 <a:latin typeface="Malgun Gothic"/>
                 <a:ea typeface="Malgun Gothic"/>
                 <a:cs typeface="Malgun Gothic"/>
-                <a:hlinkClick r:id="rId5"/>
+                <a:hlinkClick r:id="rId6"/>
               </a:rPr>
               <a:t>울산지노위, 현대차 사내하청 '사용자성' 첫 인정</a:t>
             </a:r>
@@ -4838,7 +4838,7 @@
                 <a:latin typeface="Malgun Gothic"/>
                 <a:ea typeface="Malgun Gothic"/>
                 <a:cs typeface="Malgun Gothic"/>
-                <a:hlinkClick r:id="rId6"/>
+                <a:hlinkClick r:id="rId7"/>
               </a:rPr>
               <a:t>민주노총, 노란봉투법 시행 후 첫 총파업 돌입</a:t>
             </a:r>
@@ -4988,7 +4988,7 @@
                 <a:latin typeface="Malgun Gothic"/>
                 <a:ea typeface="Malgun Gothic"/>
                 <a:cs typeface="Malgun Gothic"/>
-                <a:hlinkClick r:id="rId7"/>
+                <a:hlinkClick r:id="rId8"/>
               </a:rPr>
               <a:t>현대차 노조, 부분파업 지속…임단협 장기전</a:t>
             </a:r>
@@ -5138,7 +5138,7 @@
                 <a:latin typeface="Malgun Gothic"/>
                 <a:ea typeface="Malgun Gothic"/>
                 <a:cs typeface="Malgun Gothic"/>
-                <a:hlinkClick r:id="rId8"/>
+                <a:hlinkClick r:id="rId9"/>
               </a:rPr>
               <a:t>포스코, 58년 무분규 기록 깨지나…쟁의행위 가결</a:t>
             </a:r>
@@ -5288,7 +5288,7 @@
                 <a:latin typeface="Malgun Gothic"/>
                 <a:ea typeface="Malgun Gothic"/>
                 <a:cs typeface="Malgun Gothic"/>
-                <a:hlinkClick r:id="rId9"/>
+                <a:hlinkClick r:id="rId10"/>
               </a:rPr>
               <a:t>금융노조, 주4.5일제 두고 하투 격화</a:t>
             </a:r>
